--- a/Chapter 8 - Self Supervised Learning/Auto Encoders and VAEs/Auto-Encoders.pptx
+++ b/Chapter 8 - Self Supervised Learning/Auto Encoders and VAEs/Auto-Encoders.pptx
@@ -5,7 +5,7 @@
     <p:sldMasterId id="2147483673" r:id="rId1"/>
   </p:sldMasterIdLst>
   <p:notesMasterIdLst>
-    <p:notesMasterId r:id="rId10"/>
+    <p:notesMasterId r:id="rId9"/>
   </p:notesMasterIdLst>
   <p:sldIdLst>
     <p:sldId id="282" r:id="rId2"/>
@@ -15,24 +15,23 @@
     <p:sldId id="286" r:id="rId6"/>
     <p:sldId id="287" r:id="rId7"/>
     <p:sldId id="288" r:id="rId8"/>
-    <p:sldId id="289" r:id="rId9"/>
   </p:sldIdLst>
   <p:sldSz cx="24384000" cy="13716000"/>
   <p:notesSz cx="6858000" cy="9144000"/>
   <p:embeddedFontLst>
     <p:embeddedFont>
       <p:font typeface="Montserrat SemiBold" panose="020F0502020204030204" pitchFamily="34" charset="0"/>
-      <p:regular r:id="rId11"/>
-      <p:bold r:id="rId12"/>
-      <p:italic r:id="rId13"/>
-      <p:boldItalic r:id="rId14"/>
+      <p:regular r:id="rId10"/>
+      <p:bold r:id="rId11"/>
+      <p:italic r:id="rId12"/>
+      <p:boldItalic r:id="rId13"/>
     </p:embeddedFont>
     <p:embeddedFont>
       <p:font typeface="Poppins" pitchFamily="2" charset="77"/>
-      <p:regular r:id="rId15"/>
-      <p:bold r:id="rId16"/>
-      <p:italic r:id="rId17"/>
-      <p:boldItalic r:id="rId18"/>
+      <p:regular r:id="rId14"/>
+      <p:bold r:id="rId15"/>
+      <p:italic r:id="rId16"/>
+      <p:boldItalic r:id="rId17"/>
     </p:embeddedFont>
   </p:embeddedFontLst>
   <p:defaultTextStyle>
@@ -2519,152 +2518,6 @@
             <a:fld id="{00000000-1234-1234-1234-123412341234}" type="slidenum">
               <a:rPr lang="pt-PT"/>
               <a:t>7</a:t>
-            </a:fld>
-            <a:endParaRPr/>
-          </a:p>
-        </p:txBody>
-      </p:sp>
-    </p:spTree>
-  </p:cSld>
-  <p:clrMapOvr>
-    <a:masterClrMapping/>
-  </p:clrMapOvr>
-</p:notes>
-</file>
-
-<file path=ppt/notesSlides/notesSlide8.xml><?xml version="1.0" encoding="utf-8"?>
-<p:notes xmlns:a="http://schemas.openxmlformats.org/drawingml/2006/main" xmlns:r="http://schemas.openxmlformats.org/officeDocument/2006/relationships" xmlns:p="http://schemas.openxmlformats.org/presentationml/2006/main" showMasterSp="0" showMasterPhAnim="0">
-  <p:cSld>
-    <p:spTree>
-      <p:nvGrpSpPr>
-        <p:cNvPr id="1" name="Shape 445"/>
-        <p:cNvGrpSpPr/>
-        <p:nvPr/>
-      </p:nvGrpSpPr>
-      <p:grpSpPr>
-        <a:xfrm>
-          <a:off x="0" y="0"/>
-          <a:ext cx="0" cy="0"/>
-          <a:chOff x="0" y="0"/>
-          <a:chExt cx="0" cy="0"/>
-        </a:xfrm>
-      </p:grpSpPr>
-      <p:sp>
-        <p:nvSpPr>
-          <p:cNvPr id="446" name="Google Shape;446;g2c03776067f_0_49:notes"/>
-          <p:cNvSpPr>
-            <a:spLocks noGrp="1" noRot="1" noChangeAspect="1"/>
-          </p:cNvSpPr>
-          <p:nvPr>
-            <p:ph type="sldImg" idx="2"/>
-          </p:nvPr>
-        </p:nvSpPr>
-        <p:spPr>
-          <a:xfrm>
-            <a:off x="381000" y="685800"/>
-            <a:ext cx="6096000" cy="3429000"/>
-          </a:xfrm>
-          <a:custGeom>
-            <a:avLst/>
-            <a:gdLst/>
-            <a:ahLst/>
-            <a:cxnLst/>
-            <a:rect l="l" t="t" r="r" b="b"/>
-            <a:pathLst>
-              <a:path w="120000" h="120000" extrusionOk="0">
-                <a:moveTo>
-                  <a:pt x="0" y="0"/>
-                </a:moveTo>
-                <a:lnTo>
-                  <a:pt x="120000" y="0"/>
-                </a:lnTo>
-                <a:lnTo>
-                  <a:pt x="120000" y="120000"/>
-                </a:lnTo>
-                <a:lnTo>
-                  <a:pt x="0" y="120000"/>
-                </a:lnTo>
-                <a:close/>
-              </a:path>
-            </a:pathLst>
-          </a:custGeom>
-        </p:spPr>
-      </p:sp>
-      <p:sp>
-        <p:nvSpPr>
-          <p:cNvPr id="447" name="Google Shape;447;g2c03776067f_0_49:notes"/>
-          <p:cNvSpPr txBox="1">
-            <a:spLocks noGrp="1"/>
-          </p:cNvSpPr>
-          <p:nvPr>
-            <p:ph type="body" idx="1"/>
-          </p:nvPr>
-        </p:nvSpPr>
-        <p:spPr>
-          <a:xfrm>
-            <a:off x="685800" y="4343400"/>
-            <a:ext cx="5486400" cy="4114800"/>
-          </a:xfrm>
-          <a:prstGeom prst="rect">
-            <a:avLst/>
-          </a:prstGeom>
-        </p:spPr>
-        <p:txBody>
-          <a:bodyPr spcFirstLastPara="1" wrap="square" lIns="91425" tIns="45700" rIns="91425" bIns="45700" anchor="t" anchorCtr="0">
-            <a:noAutofit/>
-          </a:bodyPr>
-          <a:lstStyle/>
-          <a:p>
-            <a:pPr marL="0" lvl="0" indent="0" algn="l" rtl="0">
-              <a:spcBef>
-                <a:spcPts val="0"/>
-              </a:spcBef>
-              <a:spcAft>
-                <a:spcPts val="0"/>
-              </a:spcAft>
-              <a:buNone/>
-            </a:pPr>
-            <a:endParaRPr/>
-          </a:p>
-        </p:txBody>
-      </p:sp>
-      <p:sp>
-        <p:nvSpPr>
-          <p:cNvPr id="448" name="Google Shape;448;g2c03776067f_0_49:notes"/>
-          <p:cNvSpPr txBox="1">
-            <a:spLocks noGrp="1"/>
-          </p:cNvSpPr>
-          <p:nvPr>
-            <p:ph type="sldNum" idx="12"/>
-          </p:nvPr>
-        </p:nvSpPr>
-        <p:spPr>
-          <a:xfrm>
-            <a:off x="3884613" y="8685213"/>
-            <a:ext cx="2971800" cy="457200"/>
-          </a:xfrm>
-          <a:prstGeom prst="rect">
-            <a:avLst/>
-          </a:prstGeom>
-        </p:spPr>
-        <p:txBody>
-          <a:bodyPr spcFirstLastPara="1" wrap="square" lIns="91425" tIns="45700" rIns="91425" bIns="45700" anchor="b" anchorCtr="0">
-            <a:noAutofit/>
-          </a:bodyPr>
-          <a:lstStyle/>
-          <a:p>
-            <a:pPr marL="0" lvl="0" indent="0" algn="r" rtl="0">
-              <a:spcBef>
-                <a:spcPts val="0"/>
-              </a:spcBef>
-              <a:spcAft>
-                <a:spcPts val="0"/>
-              </a:spcAft>
-              <a:buNone/>
-            </a:pPr>
-            <a:fld id="{00000000-1234-1234-1234-123412341234}" type="slidenum">
-              <a:rPr lang="pt-PT"/>
-              <a:t>8</a:t>
             </a:fld>
             <a:endParaRPr/>
           </a:p>
@@ -11592,7 +11445,7 @@
               <a:buNone/>
             </a:pPr>
             <a:r>
-              <a:rPr lang="pt-PT" sz="4800">
+              <a:rPr lang="pt-PT" sz="4800" dirty="0">
                 <a:solidFill>
                   <a:schemeClr val="dk1"/>
                 </a:solidFill>
@@ -11601,9 +11454,57 @@
                 <a:cs typeface="Poppins"/>
                 <a:sym typeface="Poppins"/>
               </a:rPr>
-              <a:t>New Image applications emerge (2014+)</a:t>
+              <a:t>New </a:t>
             </a:r>
-            <a:endParaRPr sz="1800"/>
+            <a:r>
+              <a:rPr lang="pt-PT" sz="4800" dirty="0" err="1">
+                <a:solidFill>
+                  <a:schemeClr val="dk1"/>
+                </a:solidFill>
+                <a:latin typeface="Poppins"/>
+                <a:ea typeface="Poppins"/>
+                <a:cs typeface="Poppins"/>
+                <a:sym typeface="Poppins"/>
+              </a:rPr>
+              <a:t>Image</a:t>
+            </a:r>
+            <a:r>
+              <a:rPr lang="pt-PT" sz="4800" dirty="0">
+                <a:solidFill>
+                  <a:schemeClr val="dk1"/>
+                </a:solidFill>
+                <a:latin typeface="Poppins"/>
+                <a:ea typeface="Poppins"/>
+                <a:cs typeface="Poppins"/>
+                <a:sym typeface="Poppins"/>
+              </a:rPr>
+              <a:t> </a:t>
+            </a:r>
+            <a:r>
+              <a:rPr lang="pt-PT" sz="4800" dirty="0" err="1">
+                <a:solidFill>
+                  <a:schemeClr val="dk1"/>
+                </a:solidFill>
+                <a:latin typeface="Poppins"/>
+                <a:ea typeface="Poppins"/>
+                <a:cs typeface="Poppins"/>
+                <a:sym typeface="Poppins"/>
+              </a:rPr>
+              <a:t>applications</a:t>
+            </a:r>
+            <a:r>
+              <a:rPr lang="pt-PT" sz="4800" dirty="0">
+                <a:solidFill>
+                  <a:schemeClr val="dk1"/>
+                </a:solidFill>
+                <a:latin typeface="Poppins"/>
+                <a:ea typeface="Poppins"/>
+                <a:cs typeface="Poppins"/>
+                <a:sym typeface="Poppins"/>
+              </a:rPr>
+              <a:t> emerge (2014+)</a:t>
+            </a:r>
+            <a:endParaRPr sz="1800" dirty="0"/>
           </a:p>
         </p:txBody>
       </p:sp>
@@ -11634,201 +11535,6 @@
           </a:ln>
         </p:spPr>
       </p:pic>
-    </p:spTree>
-  </p:cSld>
-  <p:clrMapOvr>
-    <a:masterClrMapping/>
-  </p:clrMapOvr>
-</p:sld>
-</file>
-
-<file path=ppt/slides/slide8.xml><?xml version="1.0" encoding="utf-8"?>
-<p:sld xmlns:a="http://schemas.openxmlformats.org/drawingml/2006/main" xmlns:r="http://schemas.openxmlformats.org/officeDocument/2006/relationships" xmlns:p="http://schemas.openxmlformats.org/presentationml/2006/main">
-  <p:cSld>
-    <p:spTree>
-      <p:nvGrpSpPr>
-        <p:cNvPr id="1" name="Shape 449"/>
-        <p:cNvGrpSpPr/>
-        <p:nvPr/>
-      </p:nvGrpSpPr>
-      <p:grpSpPr>
-        <a:xfrm>
-          <a:off x="0" y="0"/>
-          <a:ext cx="0" cy="0"/>
-          <a:chOff x="0" y="0"/>
-          <a:chExt cx="0" cy="0"/>
-        </a:xfrm>
-      </p:grpSpPr>
-      <p:sp>
-        <p:nvSpPr>
-          <p:cNvPr id="450" name="Google Shape;450;p60"/>
-          <p:cNvSpPr txBox="1">
-            <a:spLocks noGrp="1"/>
-          </p:cNvSpPr>
-          <p:nvPr>
-            <p:ph type="title"/>
-          </p:nvPr>
-        </p:nvSpPr>
-        <p:spPr>
-          <a:xfrm>
-            <a:off x="5424000" y="810000"/>
-            <a:ext cx="15959400" cy="1512000"/>
-          </a:xfrm>
-          <a:prstGeom prst="rect">
-            <a:avLst/>
-          </a:prstGeom>
-        </p:spPr>
-        <p:txBody>
-          <a:bodyPr spcFirstLastPara="1" wrap="square" lIns="91425" tIns="45700" rIns="91425" bIns="45700" anchor="ctr" anchorCtr="0">
-            <a:normAutofit fontScale="90000"/>
-          </a:bodyPr>
-          <a:lstStyle/>
-          <a:p>
-            <a:pPr marL="0" lvl="0" indent="0" algn="l" rtl="0">
-              <a:spcBef>
-                <a:spcPts val="0"/>
-              </a:spcBef>
-              <a:spcAft>
-                <a:spcPts val="0"/>
-              </a:spcAft>
-              <a:buNone/>
-            </a:pPr>
-            <a:r>
-              <a:rPr lang="pt-PT"/>
-              <a:t>Image Generation - early days</a:t>
-            </a:r>
-            <a:endParaRPr/>
-          </a:p>
-        </p:txBody>
-      </p:sp>
-      <p:sp>
-        <p:nvSpPr>
-          <p:cNvPr id="451" name="Google Shape;451;p60"/>
-          <p:cNvSpPr txBox="1"/>
-          <p:nvPr/>
-        </p:nvSpPr>
-        <p:spPr>
-          <a:xfrm>
-            <a:off x="512425" y="2978000"/>
-            <a:ext cx="13878000" cy="861900"/>
-          </a:xfrm>
-          <a:prstGeom prst="rect">
-            <a:avLst/>
-          </a:prstGeom>
-          <a:noFill/>
-          <a:ln>
-            <a:noFill/>
-          </a:ln>
-        </p:spPr>
-        <p:txBody>
-          <a:bodyPr spcFirstLastPara="1" wrap="square" lIns="91425" tIns="91425" rIns="91425" bIns="91425" anchor="t" anchorCtr="0">
-            <a:spAutoFit/>
-          </a:bodyPr>
-          <a:lstStyle/>
-          <a:p>
-            <a:pPr marL="0" lvl="0" indent="0" algn="l" rtl="0">
-              <a:spcBef>
-                <a:spcPts val="0"/>
-              </a:spcBef>
-              <a:spcAft>
-                <a:spcPts val="0"/>
-              </a:spcAft>
-              <a:buNone/>
-            </a:pPr>
-            <a:r>
-              <a:rPr lang="pt-PT" sz="4400">
-                <a:solidFill>
-                  <a:schemeClr val="dk1"/>
-                </a:solidFill>
-                <a:latin typeface="Poppins"/>
-                <a:ea typeface="Poppins"/>
-                <a:cs typeface="Poppins"/>
-                <a:sym typeface="Poppins"/>
-              </a:rPr>
-              <a:t>GANs - Generative Adversarial Networks (2014)</a:t>
-            </a:r>
-            <a:endParaRPr/>
-          </a:p>
-        </p:txBody>
-      </p:sp>
-      <p:pic>
-        <p:nvPicPr>
-          <p:cNvPr id="452" name="Google Shape;452;p60"/>
-          <p:cNvPicPr preferRelativeResize="0"/>
-          <p:nvPr/>
-        </p:nvPicPr>
-        <p:blipFill>
-          <a:blip r:embed="rId3">
-            <a:alphaModFix/>
-          </a:blip>
-          <a:stretch>
-            <a:fillRect/>
-          </a:stretch>
-        </p:blipFill>
-        <p:spPr>
-          <a:xfrm>
-            <a:off x="2864225" y="4495900"/>
-            <a:ext cx="17002525" cy="7039049"/>
-          </a:xfrm>
-          <a:prstGeom prst="rect">
-            <a:avLst/>
-          </a:prstGeom>
-          <a:noFill/>
-          <a:ln>
-            <a:noFill/>
-          </a:ln>
-        </p:spPr>
-      </p:pic>
-      <p:sp>
-        <p:nvSpPr>
-          <p:cNvPr id="453" name="Google Shape;453;p60"/>
-          <p:cNvSpPr txBox="1"/>
-          <p:nvPr/>
-        </p:nvSpPr>
-        <p:spPr>
-          <a:xfrm>
-            <a:off x="6633025" y="11534950"/>
-            <a:ext cx="12951600" cy="384900"/>
-          </a:xfrm>
-          <a:prstGeom prst="rect">
-            <a:avLst/>
-          </a:prstGeom>
-          <a:noFill/>
-          <a:ln>
-            <a:noFill/>
-          </a:ln>
-        </p:spPr>
-        <p:txBody>
-          <a:bodyPr spcFirstLastPara="1" wrap="square" lIns="91425" tIns="91425" rIns="91425" bIns="91425" anchor="t" anchorCtr="0">
-            <a:spAutoFit/>
-          </a:bodyPr>
-          <a:lstStyle/>
-          <a:p>
-            <a:pPr marL="0" lvl="0" indent="0" algn="l" rtl="0">
-              <a:spcBef>
-                <a:spcPts val="0"/>
-              </a:spcBef>
-              <a:spcAft>
-                <a:spcPts val="0"/>
-              </a:spcAft>
-              <a:buNone/>
-            </a:pPr>
-            <a:r>
-              <a:rPr lang="pt-PT" sz="1300">
-                <a:solidFill>
-                  <a:schemeClr val="dk1"/>
-                </a:solidFill>
-                <a:latin typeface="Poppins"/>
-                <a:ea typeface="Poppins"/>
-                <a:cs typeface="Poppins"/>
-                <a:sym typeface="Poppins"/>
-              </a:rPr>
-              <a:t>Basic architecture of a generic GAN. Source: https://www.youtube.com/watch?v=dCKbRCUyop8</a:t>
-            </a:r>
-            <a:endParaRPr sz="1300"/>
-          </a:p>
-        </p:txBody>
-      </p:sp>
     </p:spTree>
   </p:cSld>
   <p:clrMapOvr>
